--- a/ppt/truthprint_presentation_ko_20260723.pptx
+++ b/ppt/truthprint_presentation_ko_20260723.pptx
@@ -182,25 +182,25 @@
                 <c:ptCount val="7"/>
                 <c:lvl>
                   <c:pt idx="0">
-                    <c:v>10%</c:v>
+                    <c:v>40%</c:v>
                   </c:pt>
                   <c:pt idx="1">
-                    <c:v>20%</c:v>
+                    <c:v>42%</c:v>
                   </c:pt>
                   <c:pt idx="2">
-                    <c:v>30%</c:v>
+                    <c:v>44%</c:v>
                   </c:pt>
                   <c:pt idx="3">
-                    <c:v>40%</c:v>
+                    <c:v>46%</c:v>
                   </c:pt>
                   <c:pt idx="4">
+                    <c:v>48%</c:v>
+                  </c:pt>
+                  <c:pt idx="5">
                     <c:v>50%</c:v>
                   </c:pt>
-                  <c:pt idx="5">
-                    <c:v>55%</c:v>
-                  </c:pt>
                   <c:pt idx="6">
-                    <c:v>60%</c:v>
+                    <c:v>52%</c:v>
                   </c:pt>
                 </c:lvl>
               </c:multiLvlStrCache>
@@ -216,19 +216,19 @@
                   <c:v>100</c:v>
                 </c:pt>
                 <c:pt idx="1">
-                  <c:v>100</c:v>
+                  <c:v>99.8</c:v>
                 </c:pt>
                 <c:pt idx="2">
-                  <c:v>100</c:v>
+                  <c:v>98.2</c:v>
                 </c:pt>
                 <c:pt idx="3">
-                  <c:v>100</c:v>
+                  <c:v>95</c:v>
                 </c:pt>
                 <c:pt idx="4">
-                  <c:v>27</c:v>
+                  <c:v>77.4</c:v>
                 </c:pt>
                 <c:pt idx="5">
-                  <c:v>0</c:v>
+                  <c:v>29</c:v>
                 </c:pt>
                 <c:pt idx="6">
                   <c:v>0</c:v>
@@ -9616,7 +9616,7 @@
                 <a:ea typeface="Malgun Gothic" pitchFamily="34" charset="-122"/>
                 <a:cs typeface="Malgun Gothic" pitchFamily="34" charset="-120"/>
               </a:rPr>
-              <a:t>테스트 15개 전부 통과 — 곧 재현 하네스</a:t>
+              <a:t>테스트 18개 전부 통과 — 곧 재현 하네스</a:t>
             </a:r>
             <a:endParaRPr lang="en-US" sz="1550" dirty="0"/>
           </a:p>
@@ -9676,7 +9676,7 @@
                 <a:ea typeface="Malgun Gothic" pitchFamily="34" charset="-122"/>
                 <a:cs typeface="Malgun Gothic" pitchFamily="34" charset="-120"/>
               </a:rPr>
-              <a:t>소거율↔복구율 ‘절벽’을 실측 재현</a:t>
+              <a:t>소거·복구 절벽 + 베이스라인 4종 대비 실측 재현</a:t>
             </a:r>
             <a:endParaRPr lang="en-US" sz="1550" dirty="0"/>
           </a:p>
@@ -9804,7 +9804,7 @@
                 <a:ea typeface="Malgun Gothic" pitchFamily="34" charset="-122"/>
                 <a:cs typeface="Malgun Gothic" pitchFamily="34" charset="-120"/>
               </a:rPr>
-              <a:t>40% 소거까지 ~100% 복구, 50% 부근에서 급락 (용량 한계)</a:t>
+              <a:t>42% 소거까지 완전 복구, 48%→77%·50%→29% 점진 감소 후 급락</a:t>
             </a:r>
             <a:endParaRPr lang="en-US" sz="1150" dirty="0"/>
           </a:p>
@@ -10075,7 +10075,7 @@
                 <a:ea typeface="Malgun Gothic" pitchFamily="34" charset="-122"/>
                 <a:cs typeface="Malgun Gothic" pitchFamily="34" charset="-120"/>
               </a:rPr>
-              <a:t>SynthID-Text, KGW</a:t>
+              <a:t>SynthID-Text · KGW · DEW</a:t>
             </a:r>
             <a:endParaRPr lang="en-US" sz="1300" dirty="0"/>
           </a:p>
@@ -10114,7 +10114,7 @@
                 <a:ea typeface="Malgun Gothic" pitchFamily="34" charset="-122"/>
                 <a:cs typeface="Malgun Gothic" pitchFamily="34" charset="-120"/>
               </a:rPr>
-              <a:t>번역·패러프레이즈로 토큰 결정이 교체되면 신호 소실</a:t>
+              <a:t>번역 시 토큰 교체로 신호 소실 — 실측 번역 TPR 0.00–0.02 (붕괴)</a:t>
             </a:r>
             <a:endParaRPr lang="en-US" sz="1400" dirty="0"/>
           </a:p>
@@ -10248,7 +10248,7 @@
                 <a:ea typeface="Malgun Gothic" pitchFamily="34" charset="-122"/>
                 <a:cs typeface="Malgun Gothic" pitchFamily="34" charset="-120"/>
               </a:rPr>
-              <a:t>SIR, SemaMark</a:t>
+              <a:t>SemStamp</a:t>
             </a:r>
             <a:endParaRPr lang="en-US" sz="1300" dirty="0"/>
           </a:p>
@@ -10287,7 +10287,7 @@
                 <a:ea typeface="Malgun Gothic" pitchFamily="34" charset="-122"/>
                 <a:cs typeface="Malgun Gothic" pitchFamily="34" charset="-120"/>
               </a:rPr>
-              <a:t>임베딩 유사도는 어떤 핵심 사실을 지킬지 명시하지 않음</a:t>
+              <a:t>임베딩 유사도는 지킬 사실을 명시 못함 — 실측 0.99 (생존)</a:t>
             </a:r>
             <a:endParaRPr lang="en-US" sz="1400" dirty="0"/>
           </a:p>
@@ -10460,7 +10460,7 @@
                 <a:ea typeface="Malgun Gothic" pitchFamily="34" charset="-122"/>
                 <a:cs typeface="Malgun Gothic" pitchFamily="34" charset="-120"/>
               </a:rPr>
-              <a:t>기존 의미 형식을 그대로 채택 — 워터마크 전용 계약은 아님</a:t>
+              <a:t>의미 구조라 번역 생존(실측 1.00)하나 인증·전용 계약 없음</a:t>
             </a:r>
             <a:endParaRPr lang="en-US" sz="1400" dirty="0"/>
           </a:p>
@@ -10633,7 +10633,7 @@
                 <a:ea typeface="Malgun Gothic" pitchFamily="34" charset="-122"/>
                 <a:cs typeface="Malgun Gothic" pitchFamily="34" charset="-120"/>
               </a:rPr>
-              <a:t>타입 지정 불변식 계약 + 인증 페이로드 — ‘무엇을 지킬지’를 기계가 검증</a:t>
+              <a:t>타입 지정 불변식 계약 + 인증 — 실측 1.00, 유일하게 위조 불가(MAC)</a:t>
             </a:r>
             <a:endParaRPr lang="en-US" sz="1400" dirty="0"/>
           </a:p>
